--- a/apps/shell/resources/templates/Quarterly Review.pptx
+++ b/apps/shell/resources/templates/Quarterly Review.pptx
@@ -3323,7 +3323,7 @@
                 </a:solidFill>
                 <a:latin typeface="Calibri"/>
               </a:rPr>
-              <a:t>PLOT DOCS SUITE  /  TEMPLATE LIBRARY</a:t>
+              <a:t>PLOT DOCS  /  TEMPLATE LIBRARY</a:t>
             </a:r>
           </a:p>
         </p:txBody>
@@ -3463,7 +3463,7 @@
                 </a:solidFill>
                 <a:latin typeface="Calibri"/>
               </a:rPr>
-              <a:t>PLOT DOCS SUITE</a:t>
+              <a:t>PLOT DOCS</a:t>
             </a:r>
           </a:p>
         </p:txBody>
@@ -4264,7 +4264,7 @@
                 </a:solidFill>
                 <a:latin typeface="Calibri"/>
               </a:rPr>
-              <a:t>PLOT DOCS SUITE</a:t>
+              <a:t>PLOT DOCS</a:t>
             </a:r>
           </a:p>
         </p:txBody>
@@ -5439,7 +5439,7 @@
                 </a:solidFill>
                 <a:latin typeface="Calibri"/>
               </a:rPr>
-              <a:t>PLOT DOCS SUITE</a:t>
+              <a:t>PLOT DOCS</a:t>
             </a:r>
           </a:p>
         </p:txBody>
@@ -6240,7 +6240,7 @@
                 </a:solidFill>
                 <a:latin typeface="Calibri"/>
               </a:rPr>
-              <a:t>PLOT DOCS SUITE</a:t>
+              <a:t>PLOT DOCS</a:t>
             </a:r>
           </a:p>
         </p:txBody>
